--- a/templates/47-use-cases-and-scenarios-template.pptx
+++ b/templates/47-use-cases-and-scenarios-template.pptx
@@ -3558,7 +3558,7 @@
         <p:spPr>
           <a:xfrm>
             <a:off x="457200" y="1207008"/>
-            <a:ext cx="2743200" cy="182880"/>
+            <a:ext cx="11277295" cy="274320"/>
           </a:xfrm>
           <a:prstGeom prst="rect">
             <a:avLst/>
@@ -3574,13 +3574,13 @@
           <a:p>
             <a:pPr algn="l"/>
             <a:r>
-              <a:rPr lang="en-AU" sz="800" b="1" dirty="0">
+              <a:rPr lang="en-AU" sz="1250" b="1" dirty="0">
                 <a:solidFill>
-                  <a:srgbClr val="6B6A66"/>
+                  <a:srgbClr val="184F95"/>
                 </a:solidFill>
                 <a:latin typeface="Aptos"/>
               </a:rPr>
-              <a:t>HOW TO FILL IT IN</a:t>
+              <a:t>Use Cases and Scenarios — blank template</a:t>
             </a:r>
           </a:p>
         </p:txBody>
@@ -3593,8 +3593,8 @@
         </p:nvSpPr>
         <p:spPr>
           <a:xfrm>
-            <a:off x="457200" y="1408176"/>
-            <a:ext cx="2743200" cy="914400"/>
+            <a:off x="457200" y="6089904"/>
+            <a:ext cx="11277295" cy="347472"/>
           </a:xfrm>
           <a:prstGeom prst="rect">
             <a:avLst/>
@@ -3610,274 +3610,26 @@
           <a:p>
             <a:pPr algn="l"/>
             <a:r>
-              <a:rPr lang="en-AU" sz="950" dirty="0">
-                <a:solidFill>
-                  <a:srgbClr val="0B0B0B"/>
-                </a:solidFill>
-                <a:latin typeface="Aptos"/>
-              </a:rPr>
-              <a:t>Actors outside the boundary, goals inside it. If an oval is not a goal an actor would name, it is not a use case.</a:t>
-            </a:r>
-          </a:p>
-        </p:txBody>
-      </p:sp>
-      <p:sp>
-        <p:nvSpPr>
-          <p:cNvPr id="39" name="shape39"/>
-          <p:cNvSpPr/>
-          <p:nvPr/>
-        </p:nvSpPr>
-        <p:spPr>
-          <a:xfrm>
-            <a:off x="457200" y="2414016"/>
-            <a:ext cx="2743200" cy="182880"/>
-          </a:xfrm>
-          <a:prstGeom prst="rect">
-            <a:avLst/>
-          </a:prstGeom>
-          <a:noFill/>
-          <a:ln>
-            <a:noFill/>
-          </a:ln>
-        </p:spPr>
-        <p:txBody>
-          <a:bodyPr wrap="square" anchor="b" lIns="0" rIns="0" tIns="27432" bIns="27432"/>
-          <a:lstStyle/>
-          <a:p>
-            <a:pPr algn="l"/>
-            <a:r>
-              <a:rPr lang="en-AU" sz="800" b="1" dirty="0">
+              <a:rPr lang="en-AU" sz="850" dirty="0">
                 <a:solidFill>
                   <a:srgbClr val="6B6A66"/>
                 </a:solidFill>
                 <a:latin typeface="Aptos"/>
               </a:rPr>
-              <a:t>WHAT IT IS FOR</a:t>
-            </a:r>
-          </a:p>
-        </p:txBody>
-      </p:sp>
-      <p:sp>
-        <p:nvSpPr>
-          <p:cNvPr id="40" name="shape40"/>
+              <a:t>Actors outside the boundary, goals inside it. If an oval is not a goal an actor would name, it is not a use case.</a:t>
+            </a:r>
+          </a:p>
+        </p:txBody>
+      </p:sp>
+      <p:sp>
+        <p:nvSpPr>
+          <p:cNvPr id="39" name="shape39"/>
           <p:cNvSpPr/>
           <p:nvPr/>
         </p:nvSpPr>
         <p:spPr>
           <a:xfrm>
-            <a:off x="457200" y="2615184"/>
-            <a:ext cx="2743200" cy="731520"/>
-          </a:xfrm>
-          <a:prstGeom prst="rect">
-            <a:avLst/>
-          </a:prstGeom>
-          <a:noFill/>
-          <a:ln>
-            <a:noFill/>
-          </a:ln>
-        </p:spPr>
-        <p:txBody>
-          <a:bodyPr wrap="square" anchor="t" lIns="0" rIns="0" tIns="27432" bIns="27432"/>
-          <a:lstStyle/>
-          <a:p>
-            <a:pPr algn="l"/>
-            <a:r>
-              <a:rPr lang="en-AU" sz="950" dirty="0">
-                <a:solidFill>
-                  <a:srgbClr val="0B0B0B"/>
-                </a:solidFill>
-                <a:latin typeface="Aptos"/>
-              </a:rPr>
-              <a:t>Describes how an actor interacts with a solution to achieve a goal, including the main flow and the alternatives and exceptions.</a:t>
-            </a:r>
-          </a:p>
-        </p:txBody>
-      </p:sp>
-      <p:sp>
-        <p:nvSpPr>
-          <p:cNvPr id="41" name="shape41"/>
-          <p:cNvSpPr/>
-          <p:nvPr/>
-        </p:nvSpPr>
-        <p:spPr>
-          <a:xfrm>
-            <a:off x="457200" y="3438144"/>
-            <a:ext cx="2743200" cy="182880"/>
-          </a:xfrm>
-          <a:prstGeom prst="rect">
-            <a:avLst/>
-          </a:prstGeom>
-          <a:noFill/>
-          <a:ln>
-            <a:noFill/>
-          </a:ln>
-        </p:spPr>
-        <p:txBody>
-          <a:bodyPr wrap="square" anchor="b" lIns="0" rIns="0" tIns="27432" bIns="27432"/>
-          <a:lstStyle/>
-          <a:p>
-            <a:pPr algn="l"/>
-            <a:r>
-              <a:rPr lang="en-AU" sz="800" b="1" dirty="0">
-                <a:solidFill>
-                  <a:srgbClr val="6B6A66"/>
-                </a:solidFill>
-                <a:latin typeface="Aptos"/>
-              </a:rPr>
-              <a:t>MOST OFTEN CONFUSED WITH</a:t>
-            </a:r>
-          </a:p>
-        </p:txBody>
-      </p:sp>
-      <p:sp>
-        <p:nvSpPr>
-          <p:cNvPr id="42" name="shape42"/>
-          <p:cNvSpPr/>
-          <p:nvPr/>
-        </p:nvSpPr>
-        <p:spPr>
-          <a:xfrm>
-            <a:off x="457200" y="3639312"/>
-            <a:ext cx="2743200" cy="1737360"/>
-          </a:xfrm>
-          <a:prstGeom prst="rect">
-            <a:avLst/>
-          </a:prstGeom>
-          <a:solidFill>
-            <a:srgbClr val="F7F7F5"/>
-          </a:solidFill>
-          <a:ln>
-            <a:noFill/>
-          </a:ln>
-        </p:spPr>
-        <p:txBody>
-          <a:bodyPr wrap="square" anchor="t" lIns="91440" rIns="91440" tIns="27432" bIns="27432"/>
-          <a:lstStyle/>
-          <a:p>
-            <a:pPr algn="l"/>
-            <a:r>
-              <a:rPr lang="en-AU" sz="900" dirty="0">
-                <a:solidFill>
-                  <a:srgbClr val="0B0B0B"/>
-                </a:solidFill>
-                <a:latin typeface="Aptos"/>
-              </a:rPr>
-              <a:t>A use case is goal-oriented interaction with the solution; a process model is the flow of business work. Use cases carry alternate and exception flows, which is usually the discriminating detail in a stem.</a:t>
-            </a:r>
-          </a:p>
-        </p:txBody>
-      </p:sp>
-      <p:sp>
-        <p:nvSpPr>
-          <p:cNvPr id="43" name="shape43"/>
-          <p:cNvSpPr/>
-          <p:nvPr/>
-        </p:nvSpPr>
-        <p:spPr>
-          <a:xfrm>
-            <a:off x="457200" y="3639312"/>
-            <a:ext cx="32004" cy="1737360"/>
-          </a:xfrm>
-          <a:prstGeom prst="rect">
-            <a:avLst/>
-          </a:prstGeom>
-          <a:solidFill>
-            <a:srgbClr val="FAB219"/>
-          </a:solidFill>
-          <a:ln>
-            <a:noFill/>
-          </a:ln>
-        </p:spPr>
-        <p:txBody>
-          <a:bodyPr wrap="square" anchor="ctr" lIns="54864" rIns="54864" tIns="27432" bIns="27432"/>
-          <a:lstStyle/>
-          <a:p>
-            <a:pPr algn="l"/>
-            <a:endParaRPr lang="en-AU" sz="1100"/>
-          </a:p>
-        </p:txBody>
-      </p:sp>
-      <p:sp>
-        <p:nvSpPr>
-          <p:cNvPr id="44" name="shape44"/>
-          <p:cNvSpPr/>
-          <p:nvPr/>
-        </p:nvSpPr>
-        <p:spPr>
-          <a:xfrm>
-            <a:off x="457200" y="5486400"/>
-            <a:ext cx="2743200" cy="502920"/>
-          </a:xfrm>
-          <a:prstGeom prst="rect">
-            <a:avLst/>
-          </a:prstGeom>
-          <a:noFill/>
-          <a:ln>
-            <a:noFill/>
-          </a:ln>
-        </p:spPr>
-        <p:txBody>
-          <a:bodyPr wrap="square" anchor="t" lIns="0" rIns="0" tIns="27432" bIns="27432"/>
-          <a:lstStyle/>
-          <a:p>
-            <a:pPr algn="l"/>
-            <a:r>
-              <a:rPr lang="en-AU" sz="800" dirty="0">
-                <a:solidFill>
-                  <a:srgbClr val="6B6A66"/>
-                </a:solidFill>
-                <a:latin typeface="Aptos"/>
-              </a:rPr>
-              <a:t>Tasks: 7.1 Specify and Model Requirements · 7.3 Validate Requirements</a:t>
-            </a:r>
-          </a:p>
-        </p:txBody>
-      </p:sp>
-      <p:sp>
-        <p:nvSpPr>
-          <p:cNvPr id="45" name="shape45"/>
-          <p:cNvSpPr/>
-          <p:nvPr/>
-        </p:nvSpPr>
-        <p:spPr>
-          <a:xfrm>
-            <a:off x="3520440" y="1188720"/>
-            <a:ext cx="8214055" cy="237744"/>
-          </a:xfrm>
-          <a:prstGeom prst="rect">
-            <a:avLst/>
-          </a:prstGeom>
-          <a:noFill/>
-          <a:ln>
-            <a:noFill/>
-          </a:ln>
-        </p:spPr>
-        <p:txBody>
-          <a:bodyPr wrap="square" anchor="b" lIns="0" rIns="0" tIns="27432" bIns="27432"/>
-          <a:lstStyle/>
-          <a:p>
-            <a:pPr algn="l"/>
-            <a:r>
-              <a:rPr lang="en-AU" sz="1050" b="1" dirty="0">
-                <a:solidFill>
-                  <a:srgbClr val="184F95"/>
-                </a:solidFill>
-                <a:latin typeface="Aptos"/>
-              </a:rPr>
-              <a:t>Use Cases and Scenarios — blank template</a:t>
-            </a:r>
-          </a:p>
-        </p:txBody>
-      </p:sp>
-      <p:sp>
-        <p:nvSpPr>
-          <p:cNvPr id="46" name="shape46"/>
-          <p:cNvSpPr/>
-          <p:nvPr/>
-        </p:nvSpPr>
-        <p:spPr>
-          <a:xfrm>
-            <a:off x="6072988" y="1499616"/>
+            <a:off x="4541368" y="1700784"/>
             <a:ext cx="3108960" cy="3017520"/>
           </a:xfrm>
           <a:prstGeom prst="rect">
@@ -3902,13 +3654,13 @@
       </p:sp>
       <p:sp>
         <p:nvSpPr>
-          <p:cNvPr id="47" name="shape47"/>
+          <p:cNvPr id="40" name="shape40"/>
           <p:cNvSpPr/>
           <p:nvPr/>
         </p:nvSpPr>
         <p:spPr>
           <a:xfrm>
-            <a:off x="6072988" y="1517904"/>
+            <a:off x="4541368" y="1719072"/>
             <a:ext cx="3108960" cy="237744"/>
           </a:xfrm>
           <a:prstGeom prst="rect">
@@ -3938,13 +3690,13 @@
       </p:sp>
       <p:sp>
         <p:nvSpPr>
-          <p:cNvPr id="48" name="shape48"/>
+          <p:cNvPr id="41" name="shape41"/>
           <p:cNvSpPr/>
           <p:nvPr/>
         </p:nvSpPr>
         <p:spPr>
           <a:xfrm>
-            <a:off x="6301588" y="1792224"/>
+            <a:off x="4769968" y="1993392"/>
             <a:ext cx="2651760" cy="566928"/>
           </a:xfrm>
           <a:prstGeom prst="ellipse">
@@ -3970,13 +3722,13 @@
       </p:sp>
       <p:sp>
         <p:nvSpPr>
-          <p:cNvPr id="49" name="shape49"/>
+          <p:cNvPr id="42" name="shape42"/>
           <p:cNvSpPr/>
           <p:nvPr/>
         </p:nvSpPr>
         <p:spPr>
           <a:xfrm>
-            <a:off x="6301588" y="2468880"/>
+            <a:off x="4769968" y="2670048"/>
             <a:ext cx="2651760" cy="566928"/>
           </a:xfrm>
           <a:prstGeom prst="ellipse">
@@ -4002,13 +3754,13 @@
       </p:sp>
       <p:sp>
         <p:nvSpPr>
-          <p:cNvPr id="50" name="shape50"/>
+          <p:cNvPr id="43" name="shape43"/>
           <p:cNvSpPr/>
           <p:nvPr/>
         </p:nvSpPr>
         <p:spPr>
           <a:xfrm>
-            <a:off x="6301588" y="3145536"/>
+            <a:off x="4769968" y="3346704"/>
             <a:ext cx="2651760" cy="566928"/>
           </a:xfrm>
           <a:prstGeom prst="ellipse">
@@ -4034,13 +3786,13 @@
       </p:sp>
       <p:sp>
         <p:nvSpPr>
-          <p:cNvPr id="51" name="shape51"/>
+          <p:cNvPr id="44" name="shape44"/>
           <p:cNvSpPr/>
           <p:nvPr/>
         </p:nvSpPr>
         <p:spPr>
           <a:xfrm>
-            <a:off x="6301588" y="3822192"/>
+            <a:off x="4769968" y="4023360"/>
             <a:ext cx="2651760" cy="566928"/>
           </a:xfrm>
           <a:prstGeom prst="ellipse">
@@ -4066,13 +3818,13 @@
       </p:sp>
       <p:sp>
         <p:nvSpPr>
-          <p:cNvPr id="52" name="shape52"/>
+          <p:cNvPr id="45" name="shape45"/>
           <p:cNvSpPr/>
           <p:nvPr/>
         </p:nvSpPr>
         <p:spPr>
           <a:xfrm>
-            <a:off x="3520440" y="1865376"/>
+            <a:off x="457200" y="2066544"/>
             <a:ext cx="1371600" cy="502920"/>
           </a:xfrm>
           <a:prstGeom prst="roundRect">
@@ -4108,13 +3860,13 @@
       </p:sp>
       <p:sp>
         <p:nvSpPr>
-          <p:cNvPr id="53" name="shape53"/>
+          <p:cNvPr id="46" name="shape46"/>
           <p:cNvSpPr/>
           <p:nvPr/>
         </p:nvSpPr>
         <p:spPr>
           <a:xfrm>
-            <a:off x="3520440" y="3145536"/>
+            <a:off x="457200" y="3346704"/>
             <a:ext cx="1371600" cy="502920"/>
           </a:xfrm>
           <a:prstGeom prst="roundRect">
@@ -4150,13 +3902,13 @@
       </p:sp>
       <p:sp>
         <p:nvSpPr>
-          <p:cNvPr id="54" name="shape54"/>
+          <p:cNvPr id="47" name="shape47"/>
           <p:cNvSpPr/>
           <p:nvPr/>
         </p:nvSpPr>
         <p:spPr>
           <a:xfrm>
-            <a:off x="10362895" y="1865376"/>
+            <a:off x="10362895" y="2066544"/>
             <a:ext cx="1371600" cy="502920"/>
           </a:xfrm>
           <a:prstGeom prst="roundRect">
@@ -4192,14 +3944,14 @@
       </p:sp>
       <p:cxnSp>
         <p:nvCxnSpPr>
-          <p:cNvPr id="55" name="conn55"/>
+          <p:cNvPr id="48" name="conn48"/>
           <p:cNvCxnSpPr/>
           <p:nvPr/>
         </p:nvCxnSpPr>
         <p:spPr>
           <a:xfrm flipV="1">
-            <a:off x="4892040" y="2075688"/>
-            <a:ext cx="1272388" cy="36576"/>
+            <a:off x="1828800" y="2276856"/>
+            <a:ext cx="2804008" cy="36576"/>
           </a:xfrm>
           <a:prstGeom prst="line">
             <a:avLst/>
@@ -4213,14 +3965,14 @@
       </p:cxnSp>
       <p:cxnSp>
         <p:nvCxnSpPr>
-          <p:cNvPr id="56" name="conn56"/>
+          <p:cNvPr id="49" name="conn49"/>
           <p:cNvCxnSpPr/>
           <p:nvPr/>
         </p:nvCxnSpPr>
         <p:spPr>
           <a:xfrm>
-            <a:off x="4892040" y="2112264"/>
-            <a:ext cx="1272388" cy="1316736"/>
+            <a:off x="1828800" y="2313432"/>
+            <a:ext cx="2804008" cy="1316736"/>
           </a:xfrm>
           <a:prstGeom prst="line">
             <a:avLst/>
@@ -4234,14 +3986,14 @@
       </p:cxnSp>
       <p:cxnSp>
         <p:nvCxnSpPr>
-          <p:cNvPr id="57" name="conn57"/>
+          <p:cNvPr id="50" name="conn50"/>
           <p:cNvCxnSpPr/>
           <p:nvPr/>
         </p:nvCxnSpPr>
         <p:spPr>
           <a:xfrm flipH="1">
-            <a:off x="9090508" y="2112264"/>
-            <a:ext cx="1272388" cy="640080"/>
+            <a:off x="7558888" y="2313432"/>
+            <a:ext cx="2804008" cy="640080"/>
           </a:xfrm>
           <a:prstGeom prst="line">
             <a:avLst/>
@@ -4255,14 +4007,14 @@
       </p:cxnSp>
       <p:cxnSp>
         <p:nvCxnSpPr>
-          <p:cNvPr id="58" name="conn58"/>
+          <p:cNvPr id="51" name="conn51"/>
           <p:cNvCxnSpPr/>
           <p:nvPr/>
         </p:nvCxnSpPr>
         <p:spPr>
           <a:xfrm>
-            <a:off x="4892040" y="3392424"/>
-            <a:ext cx="1272388" cy="713232"/>
+            <a:off x="1828800" y="3593592"/>
+            <a:ext cx="2804008" cy="713232"/>
           </a:xfrm>
           <a:prstGeom prst="line">
             <a:avLst/>
